--- a/assets/figures-editable/c3-c4/c4-e04.pptx
+++ b/assets/figures-editable/c3-c4/c4-e04.pptx
@@ -3104,8 +3104,8 @@
         </p:nvSpPr>
         <p:spPr>
           <a:xfrm>
-            <a:off x="274320" y="137160"/>
-            <a:ext cx="11612880" cy="365760"/>
+            <a:off x="274320" y="118872"/>
+            <a:ext cx="11612880" cy="340105"/>
           </a:xfrm>
           <a:prstGeom prst="rect">
             <a:avLst/>
@@ -3114,7 +3114,7 @@
           <a:effectLst/>
         </p:spPr>
         <p:txBody>
-          <a:bodyPr wrap="square" lIns="27432" rIns="27432" tIns="18288" bIns="18288" anchor="ctr">
+          <a:bodyPr wrap="none" lIns="18288" rIns="18288" tIns="18288" bIns="18288" anchor="t">
             <a:spAutoFit/>
           </a:bodyPr>
           <a:lstStyle/>
@@ -3125,7 +3125,7 @@
               </a:spcAft>
             </a:pPr>
             <a:r>
-              <a:rPr sz="2100" b="0" i="0">
+              <a:rPr sz="1900" b="1" i="0">
                 <a:solidFill>
                   <a:srgbClr val="8EDBD4"/>
                 </a:solidFill>
@@ -3138,44 +3138,14 @@
       </p:sp>
       <p:sp>
         <p:nvSpPr>
-          <p:cNvPr id="3" name="C4-E04 rect 1" descr="sci-ppt:o001"/>
-          <p:cNvSpPr/>
-          <p:nvPr/>
-        </p:nvSpPr>
-        <p:spPr>
-          <a:xfrm>
-            <a:off x="1188720" y="1188720"/>
-            <a:ext cx="6858000" cy="2148840"/>
-          </a:xfrm>
-          <a:prstGeom prst="rect">
-            <a:avLst/>
-          </a:prstGeom>
-          <a:noFill/>
-          <a:ln w="19050">
-            <a:solidFill>
-              <a:srgbClr val="B4C7D2"/>
-            </a:solidFill>
-          </a:ln>
-          <a:effectLst/>
-        </p:spPr>
-        <p:txBody>
-          <a:bodyPr rtlCol="0" anchor="ctr"/>
-          <a:lstStyle/>
-          <a:p>
-            <a:pPr algn="ctr"/>
-          </a:p>
-        </p:txBody>
-      </p:sp>
-      <p:sp>
-        <p:nvSpPr>
-          <p:cNvPr id="4" name="C4-E04 text 2" descr="sci-ppt:o002"/>
+          <p:cNvPr id="3" name="C4-E04 text 1" descr="sci-ppt:o001"/>
           <p:cNvSpPr txBox="1"/>
           <p:nvPr/>
         </p:nvSpPr>
         <p:spPr>
           <a:xfrm>
-            <a:off x="2743200" y="1828800"/>
-            <a:ext cx="5029200" cy="548640"/>
+            <a:off x="457200" y="914400"/>
+            <a:ext cx="11247120" cy="254889"/>
           </a:xfrm>
           <a:prstGeom prst="rect">
             <a:avLst/>
@@ -3184,7 +3154,7 @@
           <a:effectLst/>
         </p:spPr>
         <p:txBody>
-          <a:bodyPr wrap="square" lIns="27432" rIns="27432" tIns="18288" bIns="18288" anchor="ctr">
+          <a:bodyPr wrap="none" lIns="18288" rIns="18288" tIns="18288" bIns="18288" anchor="t">
             <a:spAutoFit/>
           </a:bodyPr>
           <a:lstStyle/>
@@ -3195,15 +3165,71 @@
               </a:spcAft>
             </a:pPr>
             <a:r>
-              <a:rPr sz="2000" b="0" i="0">
+              <a:rPr sz="1350" b="1" i="0">
                 <a:solidFill>
-                  <a:srgbClr val="E7F0F3"/>
+                  <a:srgbClr val="8EDBD4"/>
                 </a:solidFill>
                 <a:latin typeface="Arial"/>
               </a:rPr>
-              <a:t>Reference film plane Ω_f</a:t>
-            </a:r>
-          </a:p>
+              <a:t>Three energies of a vibrating film (shaded: where each is evaluated)</a:t>
+            </a:r>
+          </a:p>
+        </p:txBody>
+      </p:sp>
+      <p:sp>
+        <p:nvSpPr>
+          <p:cNvPr id="4" name="C4-E04 round_rect 2" descr="sci-ppt:o002"/>
+          <p:cNvSpPr/>
+          <p:nvPr/>
+        </p:nvSpPr>
+        <p:spPr>
+          <a:xfrm>
+            <a:off x="457200" y="1371600"/>
+            <a:ext cx="3611880" cy="3657600"/>
+          </a:xfrm>
+          <a:prstGeom prst="roundRect">
+            <a:avLst/>
+          </a:prstGeom>
+          <a:solidFill>
+            <a:srgbClr val="213E4B"/>
+          </a:solidFill>
+          <a:ln w="20320">
+            <a:solidFill>
+              <a:srgbClr val="7FC8F8"/>
+            </a:solidFill>
+          </a:ln>
+          <a:effectLst/>
+        </p:spPr>
+        <p:txBody>
+          <a:bodyPr rtlCol="0" anchor="ctr"/>
+          <a:lstStyle/>
+          <a:p>
+            <a:pPr algn="ctr"/>
+          </a:p>
+        </p:txBody>
+      </p:sp>
+      <p:sp>
+        <p:nvSpPr>
+          <p:cNvPr id="5" name="C4-E04 text 3" descr="sci-ppt:o003"/>
+          <p:cNvSpPr txBox="1"/>
+          <p:nvPr/>
+        </p:nvSpPr>
+        <p:spPr>
+          <a:xfrm>
+            <a:off x="566928" y="1426464"/>
+            <a:ext cx="3392424" cy="254889"/>
+          </a:xfrm>
+          <a:prstGeom prst="rect">
+            <a:avLst/>
+          </a:prstGeom>
+          <a:noFill/>
+          <a:effectLst/>
+        </p:spPr>
+        <p:txBody>
+          <a:bodyPr wrap="none" lIns="18288" rIns="18288" tIns="18288" bIns="18288" anchor="t">
+            <a:spAutoFit/>
+          </a:bodyPr>
+          <a:lstStyle/>
           <a:p>
             <a:pPr algn="l">
               <a:spcAft>
@@ -3211,34 +3237,34 @@
               </a:spcAft>
             </a:pPr>
             <a:r>
-              <a:rPr sz="2000" b="0" i="0">
+              <a:rPr sz="1350" b="1" i="0">
                 <a:solidFill>
-                  <a:srgbClr val="E7F0F3"/>
+                  <a:srgbClr val="7FC8F8"/>
                 </a:solidFill>
                 <a:latin typeface="Arial"/>
               </a:rPr>
-              <a:t>w(x,y,t), variation δw</a:t>
+              <a:t>Kinetic K_f</a:t>
             </a:r>
           </a:p>
         </p:txBody>
       </p:sp>
       <p:cxnSp>
         <p:nvCxnSpPr>
-          <p:cNvPr id="5" name="C4-E04 arrow 3" descr="sci-ppt:o003"/>
+          <p:cNvPr id="6" name="C4-E04 arrow 4" descr="sci-ppt:o004"/>
           <p:cNvCxnSpPr/>
           <p:nvPr/>
         </p:nvCxnSpPr>
         <p:spPr>
-          <a:xfrm>
-            <a:off x="8092440" y="2240280"/>
-            <a:ext cx="1143000" cy="0"/>
+          <a:xfrm flipV="1">
+            <a:off x="777240" y="2854741"/>
+            <a:ext cx="0" cy="162779"/>
           </a:xfrm>
           <a:prstGeom prst="line">
             <a:avLst/>
           </a:prstGeom>
-          <a:ln w="25400">
+          <a:ln w="38100">
             <a:solidFill>
-              <a:srgbClr val="8EDBD4"/>
+              <a:srgbClr val="7FC8F8"/>
             </a:solidFill>
             <a:headEnd type="none" w="med" len="med"/>
             <a:tailEnd type="triangle" w="med" len="med"/>
@@ -3246,62 +3272,6 @@
           <a:effectLst/>
         </p:spPr>
       </p:cxnSp>
-      <p:sp>
-        <p:nvSpPr>
-          <p:cNvPr id="6" name="C4-E04 text 4" descr="sci-ppt:o004"/>
-          <p:cNvSpPr txBox="1"/>
-          <p:nvPr/>
-        </p:nvSpPr>
-        <p:spPr>
-          <a:xfrm>
-            <a:off x="9418320" y="2011680"/>
-            <a:ext cx="2286000" cy="548640"/>
-          </a:xfrm>
-          <a:prstGeom prst="rect">
-            <a:avLst/>
-          </a:prstGeom>
-          <a:noFill/>
-          <a:effectLst/>
-        </p:spPr>
-        <p:txBody>
-          <a:bodyPr wrap="square" lIns="27432" rIns="27432" tIns="18288" bIns="18288" anchor="ctr">
-            <a:spAutoFit/>
-          </a:bodyPr>
-          <a:lstStyle/>
-          <a:p>
-            <a:pPr algn="l">
-              <a:spcAft>
-                <a:spcPts val="0"/>
-              </a:spcAft>
-            </a:pPr>
-            <a:r>
-              <a:rPr sz="1600" b="0" i="0">
-                <a:solidFill>
-                  <a:srgbClr val="E7F0F3"/>
-                </a:solidFill>
-                <a:latin typeface="Arial"/>
-              </a:rPr>
-              <a:t>n: outward</a:t>
-            </a:r>
-          </a:p>
-          <a:p>
-            <a:pPr algn="l">
-              <a:spcAft>
-                <a:spcPts val="0"/>
-              </a:spcAft>
-            </a:pPr>
-            <a:r>
-              <a:rPr sz="1600" b="0" i="0">
-                <a:solidFill>
-                  <a:srgbClr val="E7F0F3"/>
-                </a:solidFill>
-                <a:latin typeface="Arial"/>
-              </a:rPr>
-              <a:t>in-plane normal</a:t>
-            </a:r>
-          </a:p>
-        </p:txBody>
-      </p:sp>
       <p:cxnSp>
         <p:nvCxnSpPr>
           <p:cNvPr id="7" name="C4-E04 arrow 5" descr="sci-ppt:o005"/>
@@ -3309,16 +3279,16 @@
           <p:nvPr/>
         </p:nvCxnSpPr>
         <p:spPr>
-          <a:xfrm>
-            <a:off x="1371600" y="3520440"/>
-            <a:ext cx="1828800" cy="0"/>
+          <a:xfrm flipV="1">
+            <a:off x="1234440" y="2561424"/>
+            <a:ext cx="0" cy="456096"/>
           </a:xfrm>
           <a:prstGeom prst="line">
             <a:avLst/>
           </a:prstGeom>
-          <a:ln w="25400">
+          <a:ln w="38100">
             <a:solidFill>
-              <a:srgbClr val="8EDBD4"/>
+              <a:srgbClr val="7FC8F8"/>
             </a:solidFill>
             <a:headEnd type="none" w="med" len="med"/>
             <a:tailEnd type="triangle" w="med" len="med"/>
@@ -3326,46 +3296,30 @@
           <a:effectLst/>
         </p:spPr>
       </p:cxnSp>
-      <p:sp>
-        <p:nvSpPr>
-          <p:cNvPr id="8" name="C4-E04 text 6" descr="sci-ppt:o006"/>
-          <p:cNvSpPr txBox="1"/>
+      <p:cxnSp>
+        <p:nvCxnSpPr>
+          <p:cNvPr id="8" name="C4-E04 arrow 6" descr="sci-ppt:o006"/>
+          <p:cNvCxnSpPr/>
           <p:nvPr/>
-        </p:nvSpPr>
-        <p:spPr>
-          <a:xfrm>
-            <a:off x="3383280" y="3383280"/>
-            <a:ext cx="914400" cy="274320"/>
-          </a:xfrm>
-          <a:prstGeom prst="rect">
+        </p:nvCxnSpPr>
+        <p:spPr>
+          <a:xfrm flipV="1">
+            <a:off x="1691640" y="2358443"/>
+            <a:ext cx="0" cy="659077"/>
+          </a:xfrm>
+          <a:prstGeom prst="line">
             <a:avLst/>
           </a:prstGeom>
-          <a:noFill/>
+          <a:ln w="38100">
+            <a:solidFill>
+              <a:srgbClr val="7FC8F8"/>
+            </a:solidFill>
+            <a:headEnd type="none" w="med" len="med"/>
+            <a:tailEnd type="triangle" w="med" len="med"/>
+          </a:ln>
           <a:effectLst/>
         </p:spPr>
-        <p:txBody>
-          <a:bodyPr wrap="square" lIns="27432" rIns="27432" tIns="18288" bIns="18288" anchor="ctr">
-            <a:spAutoFit/>
-          </a:bodyPr>
-          <a:lstStyle/>
-          <a:p>
-            <a:pPr algn="l">
-              <a:spcAft>
-                <a:spcPts val="0"/>
-              </a:spcAft>
-            </a:pPr>
-            <a:r>
-              <a:rPr sz="1700" b="0" i="0">
-                <a:solidFill>
-                  <a:srgbClr val="E7F0F3"/>
-                </a:solidFill>
-                <a:latin typeface="Arial"/>
-              </a:rPr>
-              <a:t>x</a:t>
-            </a:r>
-          </a:p>
-        </p:txBody>
-      </p:sp>
+      </p:cxnSp>
       <p:cxnSp>
         <p:nvCxnSpPr>
           <p:cNvPr id="9" name="C4-E04 arrow 7" descr="sci-ppt:o007"/>
@@ -3374,15 +3328,15 @@
         </p:nvCxnSpPr>
         <p:spPr>
           <a:xfrm flipV="1">
-            <a:off x="1371600" y="2651760"/>
-            <a:ext cx="0" cy="868680"/>
+            <a:off x="2148840" y="2286000"/>
+            <a:ext cx="0" cy="731520"/>
           </a:xfrm>
           <a:prstGeom prst="line">
             <a:avLst/>
           </a:prstGeom>
-          <a:ln w="25400">
+          <a:ln w="38100">
             <a:solidFill>
-              <a:srgbClr val="8EDBD4"/>
+              <a:srgbClr val="7FC8F8"/>
             </a:solidFill>
             <a:headEnd type="none" w="med" len="med"/>
             <a:tailEnd type="triangle" w="med" len="med"/>
@@ -3390,126 +3344,78 @@
           <a:effectLst/>
         </p:spPr>
       </p:cxnSp>
-      <p:sp>
-        <p:nvSpPr>
-          <p:cNvPr id="10" name="C4-E04 text 8" descr="sci-ppt:o008"/>
-          <p:cNvSpPr txBox="1"/>
+      <p:cxnSp>
+        <p:nvCxnSpPr>
+          <p:cNvPr id="10" name="C4-E04 arrow 8" descr="sci-ppt:o008"/>
+          <p:cNvCxnSpPr/>
           <p:nvPr/>
-        </p:nvSpPr>
-        <p:spPr>
-          <a:xfrm>
-            <a:off x="731520" y="2834640"/>
-            <a:ext cx="914400" cy="274320"/>
-          </a:xfrm>
-          <a:prstGeom prst="rect">
+        </p:nvCxnSpPr>
+        <p:spPr>
+          <a:xfrm flipV="1">
+            <a:off x="2606040" y="2358443"/>
+            <a:ext cx="0" cy="659077"/>
+          </a:xfrm>
+          <a:prstGeom prst="line">
             <a:avLst/>
           </a:prstGeom>
-          <a:noFill/>
+          <a:ln w="38100">
+            <a:solidFill>
+              <a:srgbClr val="7FC8F8"/>
+            </a:solidFill>
+            <a:headEnd type="none" w="med" len="med"/>
+            <a:tailEnd type="triangle" w="med" len="med"/>
+          </a:ln>
           <a:effectLst/>
         </p:spPr>
-        <p:txBody>
-          <a:bodyPr wrap="square" lIns="27432" rIns="27432" tIns="18288" bIns="18288" anchor="ctr">
-            <a:spAutoFit/>
-          </a:bodyPr>
-          <a:lstStyle/>
-          <a:p>
-            <a:pPr algn="l">
-              <a:spcAft>
-                <a:spcPts val="0"/>
-              </a:spcAft>
-            </a:pPr>
-            <a:r>
-              <a:rPr sz="1700" b="0" i="0">
-                <a:solidFill>
-                  <a:srgbClr val="E7F0F3"/>
-                </a:solidFill>
-                <a:latin typeface="Arial"/>
-              </a:rPr>
-              <a:t>y</a:t>
-            </a:r>
-          </a:p>
-        </p:txBody>
-      </p:sp>
-      <p:sp>
-        <p:nvSpPr>
-          <p:cNvPr id="11" name="C4-E04 text 9" descr="sci-ppt:o009"/>
-          <p:cNvSpPr txBox="1"/>
+      </p:cxnSp>
+      <p:cxnSp>
+        <p:nvCxnSpPr>
+          <p:cNvPr id="11" name="C4-E04 arrow 9" descr="sci-ppt:o009"/>
+          <p:cNvCxnSpPr/>
           <p:nvPr/>
-        </p:nvSpPr>
-        <p:spPr>
-          <a:xfrm>
-            <a:off x="1828800" y="731520"/>
-            <a:ext cx="9601200" cy="320040"/>
-          </a:xfrm>
-          <a:prstGeom prst="rect">
+        </p:nvCxnSpPr>
+        <p:spPr>
+          <a:xfrm flipV="1">
+            <a:off x="3063240" y="2561424"/>
+            <a:ext cx="0" cy="456096"/>
+          </a:xfrm>
+          <a:prstGeom prst="line">
             <a:avLst/>
           </a:prstGeom>
-          <a:noFill/>
+          <a:ln w="38100">
+            <a:solidFill>
+              <a:srgbClr val="7FC8F8"/>
+            </a:solidFill>
+            <a:headEnd type="none" w="med" len="med"/>
+            <a:tailEnd type="triangle" w="med" len="med"/>
+          </a:ln>
           <a:effectLst/>
         </p:spPr>
-        <p:txBody>
-          <a:bodyPr wrap="square" lIns="27432" rIns="27432" tIns="18288" bIns="18288" anchor="ctr">
-            <a:spAutoFit/>
-          </a:bodyPr>
-          <a:lstStyle/>
-          <a:p>
-            <a:pPr algn="l">
-              <a:spcAft>
-                <a:spcPts val="0"/>
-              </a:spcAft>
-            </a:pPr>
-            <a:r>
-              <a:rPr sz="1900" b="0" i="0">
-                <a:solidFill>
-                  <a:srgbClr val="8EDBD4"/>
-                </a:solidFill>
-                <a:latin typeface="Arial"/>
-              </a:rPr>
-              <a:t>Fixed boundary: δw = 0; ∂ₙδw = 0</a:t>
-            </a:r>
-          </a:p>
-        </p:txBody>
-      </p:sp>
-      <p:sp>
-        <p:nvSpPr>
-          <p:cNvPr id="12" name="C4-E04 text 10" descr="sci-ppt:o010"/>
-          <p:cNvSpPr txBox="1"/>
+      </p:cxnSp>
+      <p:cxnSp>
+        <p:nvCxnSpPr>
+          <p:cNvPr id="12" name="C4-E04 arrow 10" descr="sci-ppt:o010"/>
+          <p:cNvCxnSpPr/>
           <p:nvPr/>
-        </p:nvSpPr>
-        <p:spPr>
-          <a:xfrm>
-            <a:off x="4846320" y="3520440"/>
-            <a:ext cx="6400800" cy="274320"/>
-          </a:xfrm>
-          <a:prstGeom prst="rect">
+        </p:nvCxnSpPr>
+        <p:spPr>
+          <a:xfrm flipV="1">
+            <a:off x="3520440" y="2854741"/>
+            <a:ext cx="0" cy="162779"/>
+          </a:xfrm>
+          <a:prstGeom prst="line">
             <a:avLst/>
           </a:prstGeom>
-          <a:noFill/>
+          <a:ln w="38100">
+            <a:solidFill>
+              <a:srgbClr val="7FC8F8"/>
+            </a:solidFill>
+            <a:headEnd type="none" w="med" len="med"/>
+            <a:tailEnd type="triangle" w="med" len="med"/>
+          </a:ln>
           <a:effectLst/>
         </p:spPr>
-        <p:txBody>
-          <a:bodyPr wrap="square" lIns="27432" rIns="27432" tIns="18288" bIns="18288" anchor="ctr">
-            <a:spAutoFit/>
-          </a:bodyPr>
-          <a:lstStyle/>
-          <a:p>
-            <a:pPr algn="l">
-              <a:spcAft>
-                <a:spcPts val="0"/>
-              </a:spcAft>
-            </a:pPr>
-            <a:r>
-              <a:rPr sz="1700" b="0" i="0">
-                <a:solidFill>
-                  <a:srgbClr val="8EDBD4"/>
-                </a:solidFill>
-                <a:latin typeface="Arial"/>
-              </a:rPr>
-              <a:t>Curvature stores U_b; slope stores U_T.</a:t>
-            </a:r>
-          </a:p>
-        </p:txBody>
-      </p:sp>
+      </p:cxnSp>
       <p:cxnSp>
         <p:nvCxnSpPr>
           <p:cNvPr id="13" name="C4-E04 line 11" descr="sci-ppt:o011"/>
@@ -3518,15 +3424,15 @@
         </p:nvCxnSpPr>
         <p:spPr>
           <a:xfrm>
-            <a:off x="274320" y="3977639"/>
-            <a:ext cx="11612880" cy="0"/>
+            <a:off x="731520" y="3017520"/>
+            <a:ext cx="3017519" cy="0"/>
           </a:xfrm>
           <a:prstGeom prst="line">
             <a:avLst/>
           </a:prstGeom>
-          <a:ln w="12700">
+          <a:ln w="17780">
             <a:solidFill>
-              <a:srgbClr val="405967"/>
+              <a:srgbClr val="B4C7D2"/>
             </a:solidFill>
           </a:ln>
           <a:effectLst/>
@@ -3540,8 +3446,8 @@
         </p:nvSpPr>
         <p:spPr>
           <a:xfrm>
-            <a:off x="320040" y="4096512"/>
-            <a:ext cx="5715000" cy="246888"/>
+            <a:off x="548640" y="3886200"/>
+            <a:ext cx="3429000" cy="216153"/>
           </a:xfrm>
           <a:prstGeom prst="rect">
             <a:avLst/>
@@ -3550,12 +3456,52 @@
           <a:effectLst/>
         </p:spPr>
         <p:txBody>
-          <a:bodyPr wrap="square" lIns="27432" rIns="27432" tIns="18288" bIns="18288" anchor="ctr">
+          <a:bodyPr wrap="none" lIns="18288" rIns="18288" tIns="18288" bIns="18288" anchor="t">
             <a:spAutoFit/>
           </a:bodyPr>
           <a:lstStyle/>
           <a:p>
-            <a:pPr algn="l">
+            <a:pPr algn="ctr">
+              <a:spcAft>
+                <a:spcPts val="0"/>
+              </a:spcAft>
+            </a:pPr>
+            <a:r>
+              <a:rPr sz="1100" b="1" i="0">
+                <a:solidFill>
+                  <a:srgbClr val="E7F0F3"/>
+                </a:solidFill>
+                <a:latin typeface="Arial"/>
+              </a:rPr>
+              <a:t>m_A/2 ∫ ẇ² dA</a:t>
+            </a:r>
+          </a:p>
+        </p:txBody>
+      </p:sp>
+      <p:sp>
+        <p:nvSpPr>
+          <p:cNvPr id="15" name="C4-E04 text 13" descr="sci-ppt:o013"/>
+          <p:cNvSpPr txBox="1"/>
+          <p:nvPr/>
+        </p:nvSpPr>
+        <p:spPr>
+          <a:xfrm>
+            <a:off x="548640" y="4663440"/>
+            <a:ext cx="3429000" cy="223900"/>
+          </a:xfrm>
+          <a:prstGeom prst="rect">
+            <a:avLst/>
+          </a:prstGeom>
+          <a:noFill/>
+          <a:effectLst/>
+        </p:spPr>
+        <p:txBody>
+          <a:bodyPr wrap="none" lIns="18288" rIns="18288" tIns="18288" bIns="18288" anchor="t">
+            <a:spAutoFit/>
+          </a:bodyPr>
+          <a:lstStyle/>
+          <a:p>
+            <a:pPr algn="ctr">
               <a:spcAft>
                 <a:spcPts val="0"/>
               </a:spcAft>
@@ -3567,21 +3513,53 @@
                 </a:solidFill>
                 <a:latin typeface="Arial"/>
               </a:rPr>
-              <a:t>• Ω_f, dA — film plane</a:t>
-            </a:r>
-          </a:p>
-        </p:txBody>
-      </p:sp>
-      <p:sp>
-        <p:nvSpPr>
-          <p:cNvPr id="15" name="C4-E04 text 13" descr="sci-ppt:o013"/>
+              <a:t>velocity of every patch</a:t>
+            </a:r>
+          </a:p>
+        </p:txBody>
+      </p:sp>
+      <p:sp>
+        <p:nvSpPr>
+          <p:cNvPr id="16" name="C4-E04 round_rect 14" descr="sci-ppt:o014"/>
+          <p:cNvSpPr/>
+          <p:nvPr/>
+        </p:nvSpPr>
+        <p:spPr>
+          <a:xfrm>
+            <a:off x="4251960" y="1371600"/>
+            <a:ext cx="3611880" cy="3657600"/>
+          </a:xfrm>
+          <a:prstGeom prst="roundRect">
+            <a:avLst/>
+          </a:prstGeom>
+          <a:solidFill>
+            <a:srgbClr val="213E4B"/>
+          </a:solidFill>
+          <a:ln w="20320">
+            <a:solidFill>
+              <a:srgbClr val="F2B880"/>
+            </a:solidFill>
+          </a:ln>
+          <a:effectLst/>
+        </p:spPr>
+        <p:txBody>
+          <a:bodyPr rtlCol="0" anchor="ctr"/>
+          <a:lstStyle/>
+          <a:p>
+            <a:pPr algn="ctr"/>
+          </a:p>
+        </p:txBody>
+      </p:sp>
+      <p:sp>
+        <p:nvSpPr>
+          <p:cNvPr id="17" name="C4-E04 text 15" descr="sci-ppt:o015"/>
           <p:cNvSpPr txBox="1"/>
           <p:nvPr/>
         </p:nvSpPr>
         <p:spPr>
           <a:xfrm>
-            <a:off x="6217920" y="4096512"/>
-            <a:ext cx="5715000" cy="246888"/>
+            <a:off x="4361688" y="1426464"/>
+            <a:ext cx="3392424" cy="254889"/>
           </a:xfrm>
           <a:prstGeom prst="rect">
             <a:avLst/>
@@ -3590,12 +3568,546 @@
           <a:effectLst/>
         </p:spPr>
         <p:txBody>
-          <a:bodyPr wrap="square" lIns="27432" rIns="27432" tIns="18288" bIns="18288" anchor="ctr">
+          <a:bodyPr wrap="none" lIns="18288" rIns="18288" tIns="18288" bIns="18288" anchor="t">
             <a:spAutoFit/>
           </a:bodyPr>
           <a:lstStyle/>
           <a:p>
             <a:pPr algn="l">
+              <a:spcAft>
+                <a:spcPts val="0"/>
+              </a:spcAft>
+            </a:pPr>
+            <a:r>
+              <a:rPr sz="1350" b="1" i="0">
+                <a:solidFill>
+                  <a:srgbClr val="F2B880"/>
+                </a:solidFill>
+                <a:latin typeface="Arial"/>
+              </a:rPr>
+              <a:t>Bending U_b</a:t>
+            </a:r>
+          </a:p>
+        </p:txBody>
+      </p:sp>
+      <p:sp>
+        <p:nvSpPr>
+          <p:cNvPr id="18" name="C4-E04 polygon 16" descr="sci-ppt:o016"/>
+          <p:cNvSpPr/>
+          <p:nvPr/>
+        </p:nvSpPr>
+        <p:spPr>
+          <a:xfrm>
+            <a:off x="4526280" y="2931815"/>
+            <a:ext cx="3017520" cy="771146"/>
+          </a:xfrm>
+          <a:custGeom>
+            <a:avLst/>
+            <a:gdLst/>
+            <a:ahLst/>
+            <a:cxnLst/>
+            <a:rect l="l" t="t" r="r" b="b"/>
+            <a:pathLst>
+              <a:path w="3017520" h="771146">
+                <a:moveTo>
+                  <a:pt x="0" y="85705"/>
+                </a:moveTo>
+                <a:lnTo>
+                  <a:pt x="25357" y="85227"/>
+                </a:lnTo>
+                <a:lnTo>
+                  <a:pt x="50714" y="83805"/>
+                </a:lnTo>
+                <a:lnTo>
+                  <a:pt x="76071" y="81465"/>
+                </a:lnTo>
+                <a:lnTo>
+                  <a:pt x="101429" y="78255"/>
+                </a:lnTo>
+                <a:lnTo>
+                  <a:pt x="126786" y="74236"/>
+                </a:lnTo>
+                <a:lnTo>
+                  <a:pt x="152143" y="69490"/>
+                </a:lnTo>
+                <a:lnTo>
+                  <a:pt x="177501" y="64113"/>
+                </a:lnTo>
+                <a:lnTo>
+                  <a:pt x="202858" y="58215"/>
+                </a:lnTo>
+                <a:lnTo>
+                  <a:pt x="228215" y="51921"/>
+                </a:lnTo>
+                <a:lnTo>
+                  <a:pt x="253573" y="45367"/>
+                </a:lnTo>
+                <a:lnTo>
+                  <a:pt x="278930" y="38697"/>
+                </a:lnTo>
+                <a:lnTo>
+                  <a:pt x="304287" y="32067"/>
+                </a:lnTo>
+                <a:lnTo>
+                  <a:pt x="329645" y="25635"/>
+                </a:lnTo>
+                <a:lnTo>
+                  <a:pt x="355002" y="19568"/>
+                </a:lnTo>
+                <a:lnTo>
+                  <a:pt x="380359" y="14030"/>
+                </a:lnTo>
+                <a:lnTo>
+                  <a:pt x="405716" y="9189"/>
+                </a:lnTo>
+                <a:lnTo>
+                  <a:pt x="431074" y="5209"/>
+                </a:lnTo>
+                <a:lnTo>
+                  <a:pt x="456431" y="2249"/>
+                </a:lnTo>
+                <a:lnTo>
+                  <a:pt x="481788" y="465"/>
+                </a:lnTo>
+                <a:lnTo>
+                  <a:pt x="507146" y="0"/>
+                </a:lnTo>
+                <a:lnTo>
+                  <a:pt x="532503" y="989"/>
+                </a:lnTo>
+                <a:lnTo>
+                  <a:pt x="557860" y="3556"/>
+                </a:lnTo>
+                <a:lnTo>
+                  <a:pt x="583218" y="7808"/>
+                </a:lnTo>
+                <a:lnTo>
+                  <a:pt x="608575" y="13839"/>
+                </a:lnTo>
+                <a:lnTo>
+                  <a:pt x="633932" y="21724"/>
+                </a:lnTo>
+                <a:lnTo>
+                  <a:pt x="659290" y="31521"/>
+                </a:lnTo>
+                <a:lnTo>
+                  <a:pt x="684647" y="43269"/>
+                </a:lnTo>
+                <a:lnTo>
+                  <a:pt x="710004" y="56985"/>
+                </a:lnTo>
+                <a:lnTo>
+                  <a:pt x="735362" y="72667"/>
+                </a:lnTo>
+                <a:lnTo>
+                  <a:pt x="760719" y="90290"/>
+                </a:lnTo>
+                <a:lnTo>
+                  <a:pt x="786076" y="109811"/>
+                </a:lnTo>
+                <a:lnTo>
+                  <a:pt x="811433" y="131162"/>
+                </a:lnTo>
+                <a:lnTo>
+                  <a:pt x="836791" y="154256"/>
+                </a:lnTo>
+                <a:lnTo>
+                  <a:pt x="862148" y="178986"/>
+                </a:lnTo>
+                <a:lnTo>
+                  <a:pt x="887505" y="205224"/>
+                </a:lnTo>
+                <a:lnTo>
+                  <a:pt x="912863" y="232824"/>
+                </a:lnTo>
+                <a:lnTo>
+                  <a:pt x="938220" y="261624"/>
+                </a:lnTo>
+                <a:lnTo>
+                  <a:pt x="963577" y="291444"/>
+                </a:lnTo>
+                <a:lnTo>
+                  <a:pt x="988935" y="322090"/>
+                </a:lnTo>
+                <a:lnTo>
+                  <a:pt x="1014292" y="353358"/>
+                </a:lnTo>
+                <a:lnTo>
+                  <a:pt x="1039649" y="385029"/>
+                </a:lnTo>
+                <a:lnTo>
+                  <a:pt x="1065007" y="416878"/>
+                </a:lnTo>
+                <a:lnTo>
+                  <a:pt x="1090364" y="448675"/>
+                </a:lnTo>
+                <a:lnTo>
+                  <a:pt x="1115721" y="480182"/>
+                </a:lnTo>
+                <a:lnTo>
+                  <a:pt x="1141078" y="511162"/>
+                </a:lnTo>
+                <a:lnTo>
+                  <a:pt x="1166436" y="541377"/>
+                </a:lnTo>
+                <a:lnTo>
+                  <a:pt x="1191793" y="570593"/>
+                </a:lnTo>
+                <a:lnTo>
+                  <a:pt x="1217150" y="598580"/>
+                </a:lnTo>
+                <a:lnTo>
+                  <a:pt x="1242508" y="625116"/>
+                </a:lnTo>
+                <a:lnTo>
+                  <a:pt x="1267865" y="649987"/>
+                </a:lnTo>
+                <a:lnTo>
+                  <a:pt x="1293222" y="672994"/>
+                </a:lnTo>
+                <a:lnTo>
+                  <a:pt x="1318580" y="693949"/>
+                </a:lnTo>
+                <a:lnTo>
+                  <a:pt x="1343937" y="712680"/>
+                </a:lnTo>
+                <a:lnTo>
+                  <a:pt x="1369294" y="729034"/>
+                </a:lnTo>
+                <a:lnTo>
+                  <a:pt x="1394652" y="742875"/>
+                </a:lnTo>
+                <a:lnTo>
+                  <a:pt x="1420009" y="754088"/>
+                </a:lnTo>
+                <a:lnTo>
+                  <a:pt x="1445366" y="762581"/>
+                </a:lnTo>
+                <a:lnTo>
+                  <a:pt x="1470724" y="768283"/>
+                </a:lnTo>
+                <a:lnTo>
+                  <a:pt x="1496081" y="771146"/>
+                </a:lnTo>
+                <a:lnTo>
+                  <a:pt x="1521438" y="771146"/>
+                </a:lnTo>
+                <a:lnTo>
+                  <a:pt x="1546795" y="768283"/>
+                </a:lnTo>
+                <a:lnTo>
+                  <a:pt x="1572153" y="762581"/>
+                </a:lnTo>
+                <a:lnTo>
+                  <a:pt x="1597510" y="754088"/>
+                </a:lnTo>
+                <a:lnTo>
+                  <a:pt x="1622867" y="742875"/>
+                </a:lnTo>
+                <a:lnTo>
+                  <a:pt x="1648225" y="729034"/>
+                </a:lnTo>
+                <a:lnTo>
+                  <a:pt x="1673582" y="712680"/>
+                </a:lnTo>
+                <a:lnTo>
+                  <a:pt x="1698939" y="693949"/>
+                </a:lnTo>
+                <a:lnTo>
+                  <a:pt x="1724297" y="672994"/>
+                </a:lnTo>
+                <a:lnTo>
+                  <a:pt x="1749654" y="649987"/>
+                </a:lnTo>
+                <a:lnTo>
+                  <a:pt x="1775011" y="625116"/>
+                </a:lnTo>
+                <a:lnTo>
+                  <a:pt x="1800369" y="598580"/>
+                </a:lnTo>
+                <a:lnTo>
+                  <a:pt x="1825726" y="570593"/>
+                </a:lnTo>
+                <a:lnTo>
+                  <a:pt x="1851083" y="541377"/>
+                </a:lnTo>
+                <a:lnTo>
+                  <a:pt x="1876441" y="511162"/>
+                </a:lnTo>
+                <a:lnTo>
+                  <a:pt x="1901798" y="480182"/>
+                </a:lnTo>
+                <a:lnTo>
+                  <a:pt x="1927155" y="448675"/>
+                </a:lnTo>
+                <a:lnTo>
+                  <a:pt x="1952512" y="416878"/>
+                </a:lnTo>
+                <a:lnTo>
+                  <a:pt x="1977870" y="385029"/>
+                </a:lnTo>
+                <a:lnTo>
+                  <a:pt x="2003227" y="353358"/>
+                </a:lnTo>
+                <a:lnTo>
+                  <a:pt x="2028584" y="322090"/>
+                </a:lnTo>
+                <a:lnTo>
+                  <a:pt x="2053942" y="291444"/>
+                </a:lnTo>
+                <a:lnTo>
+                  <a:pt x="2079299" y="261624"/>
+                </a:lnTo>
+                <a:lnTo>
+                  <a:pt x="2104656" y="232824"/>
+                </a:lnTo>
+                <a:lnTo>
+                  <a:pt x="2130014" y="205224"/>
+                </a:lnTo>
+                <a:lnTo>
+                  <a:pt x="2155371" y="178986"/>
+                </a:lnTo>
+                <a:lnTo>
+                  <a:pt x="2180728" y="154256"/>
+                </a:lnTo>
+                <a:lnTo>
+                  <a:pt x="2206086" y="131162"/>
+                </a:lnTo>
+                <a:lnTo>
+                  <a:pt x="2231443" y="109811"/>
+                </a:lnTo>
+                <a:lnTo>
+                  <a:pt x="2256800" y="90290"/>
+                </a:lnTo>
+                <a:lnTo>
+                  <a:pt x="2282157" y="72667"/>
+                </a:lnTo>
+                <a:lnTo>
+                  <a:pt x="2307515" y="56985"/>
+                </a:lnTo>
+                <a:lnTo>
+                  <a:pt x="2332872" y="43269"/>
+                </a:lnTo>
+                <a:lnTo>
+                  <a:pt x="2358229" y="31521"/>
+                </a:lnTo>
+                <a:lnTo>
+                  <a:pt x="2383587" y="21724"/>
+                </a:lnTo>
+                <a:lnTo>
+                  <a:pt x="2408944" y="13839"/>
+                </a:lnTo>
+                <a:lnTo>
+                  <a:pt x="2434301" y="7808"/>
+                </a:lnTo>
+                <a:lnTo>
+                  <a:pt x="2459659" y="3556"/>
+                </a:lnTo>
+                <a:lnTo>
+                  <a:pt x="2485016" y="989"/>
+                </a:lnTo>
+                <a:lnTo>
+                  <a:pt x="2510373" y="0"/>
+                </a:lnTo>
+                <a:lnTo>
+                  <a:pt x="2535731" y="465"/>
+                </a:lnTo>
+                <a:lnTo>
+                  <a:pt x="2561088" y="2249"/>
+                </a:lnTo>
+                <a:lnTo>
+                  <a:pt x="2586445" y="5209"/>
+                </a:lnTo>
+                <a:lnTo>
+                  <a:pt x="2611803" y="9189"/>
+                </a:lnTo>
+                <a:lnTo>
+                  <a:pt x="2637160" y="14030"/>
+                </a:lnTo>
+                <a:lnTo>
+                  <a:pt x="2662517" y="19568"/>
+                </a:lnTo>
+                <a:lnTo>
+                  <a:pt x="2687874" y="25635"/>
+                </a:lnTo>
+                <a:lnTo>
+                  <a:pt x="2713232" y="32067"/>
+                </a:lnTo>
+                <a:lnTo>
+                  <a:pt x="2738589" y="38697"/>
+                </a:lnTo>
+                <a:lnTo>
+                  <a:pt x="2763946" y="45367"/>
+                </a:lnTo>
+                <a:lnTo>
+                  <a:pt x="2789304" y="51921"/>
+                </a:lnTo>
+                <a:lnTo>
+                  <a:pt x="2814661" y="58215"/>
+                </a:lnTo>
+                <a:lnTo>
+                  <a:pt x="2840018" y="64113"/>
+                </a:lnTo>
+                <a:lnTo>
+                  <a:pt x="2865376" y="69490"/>
+                </a:lnTo>
+                <a:lnTo>
+                  <a:pt x="2890733" y="74236"/>
+                </a:lnTo>
+                <a:lnTo>
+                  <a:pt x="2916090" y="78255"/>
+                </a:lnTo>
+                <a:lnTo>
+                  <a:pt x="2941448" y="81465"/>
+                </a:lnTo>
+                <a:lnTo>
+                  <a:pt x="2966805" y="83805"/>
+                </a:lnTo>
+                <a:lnTo>
+                  <a:pt x="2992162" y="85227"/>
+                </a:lnTo>
+                <a:lnTo>
+                  <a:pt x="3017520" y="85705"/>
+                </a:lnTo>
+              </a:path>
+            </a:pathLst>
+          </a:custGeom>
+          <a:noFill/>
+          <a:ln w="38100">
+            <a:solidFill>
+              <a:srgbClr val="F2B880"/>
+            </a:solidFill>
+          </a:ln>
+          <a:effectLst/>
+        </p:spPr>
+        <p:txBody>
+          <a:bodyPr rtlCol="0" anchor="ctr"/>
+          <a:lstStyle/>
+          <a:p>
+            <a:pPr algn="ctr"/>
+          </a:p>
+        </p:txBody>
+      </p:sp>
+      <p:sp>
+        <p:nvSpPr>
+          <p:cNvPr id="19" name="C4-E04 text 17" descr="sci-ppt:o017"/>
+          <p:cNvSpPr txBox="1"/>
+          <p:nvPr/>
+        </p:nvSpPr>
+        <p:spPr>
+          <a:xfrm>
+            <a:off x="4617720" y="1783080"/>
+            <a:ext cx="2926080" cy="223900"/>
+          </a:xfrm>
+          <a:prstGeom prst="rect">
+            <a:avLst/>
+          </a:prstGeom>
+          <a:noFill/>
+          <a:effectLst/>
+        </p:spPr>
+        <p:txBody>
+          <a:bodyPr wrap="none" lIns="18288" rIns="18288" tIns="18288" bIns="18288" anchor="t">
+            <a:spAutoFit/>
+          </a:bodyPr>
+          <a:lstStyle/>
+          <a:p>
+            <a:pPr algn="l">
+              <a:spcAft>
+                <a:spcPts val="0"/>
+              </a:spcAft>
+            </a:pPr>
+            <a:r>
+              <a:rPr sz="1150" b="0" i="0">
+                <a:solidFill>
+                  <a:srgbClr val="F2B880"/>
+                </a:solidFill>
+                <a:latin typeface="Arial"/>
+              </a:rPr>
+              <a:t>sharp bends cost most</a:t>
+            </a:r>
+          </a:p>
+        </p:txBody>
+      </p:sp>
+      <p:sp>
+        <p:nvSpPr>
+          <p:cNvPr id="20" name="C4-E04 text 18" descr="sci-ppt:o018"/>
+          <p:cNvSpPr txBox="1"/>
+          <p:nvPr/>
+        </p:nvSpPr>
+        <p:spPr>
+          <a:xfrm>
+            <a:off x="4343400" y="3886200"/>
+            <a:ext cx="3429000" cy="386588"/>
+          </a:xfrm>
+          <a:prstGeom prst="rect">
+            <a:avLst/>
+          </a:prstGeom>
+          <a:noFill/>
+          <a:effectLst/>
+        </p:spPr>
+        <p:txBody>
+          <a:bodyPr wrap="none" lIns="18288" rIns="18288" tIns="18288" bIns="18288" anchor="t">
+            <a:spAutoFit/>
+          </a:bodyPr>
+          <a:lstStyle/>
+          <a:p>
+            <a:pPr algn="ctr">
+              <a:spcAft>
+                <a:spcPts val="0"/>
+              </a:spcAft>
+            </a:pPr>
+            <a:r>
+              <a:rPr sz="1100" b="1" i="0">
+                <a:solidFill>
+                  <a:srgbClr val="E7F0F3"/>
+                </a:solidFill>
+                <a:latin typeface="Arial"/>
+              </a:rPr>
+              <a:t>D_f/2 ∫ [wₓₓ² + w_yy² + 2ν wₓₓ w_yy + 2(1−ν)</a:t>
+            </a:r>
+          </a:p>
+          <a:p>
+            <a:pPr algn="ctr">
+              <a:spcAft>
+                <a:spcPts val="0"/>
+              </a:spcAft>
+            </a:pPr>
+            <a:r>
+              <a:rPr sz="1100" b="1" i="0">
+                <a:solidFill>
+                  <a:srgbClr val="E7F0F3"/>
+                </a:solidFill>
+                <a:latin typeface="Arial"/>
+              </a:rPr>
+              <a:t>w_xy²] dA</a:t>
+            </a:r>
+          </a:p>
+        </p:txBody>
+      </p:sp>
+      <p:sp>
+        <p:nvSpPr>
+          <p:cNvPr id="21" name="C4-E04 text 19" descr="sci-ppt:o019"/>
+          <p:cNvSpPr txBox="1"/>
+          <p:nvPr/>
+        </p:nvSpPr>
+        <p:spPr>
+          <a:xfrm>
+            <a:off x="4343400" y="4663440"/>
+            <a:ext cx="3429000" cy="223900"/>
+          </a:xfrm>
+          <a:prstGeom prst="rect">
+            <a:avLst/>
+          </a:prstGeom>
+          <a:noFill/>
+          <a:effectLst/>
+        </p:spPr>
+        <p:txBody>
+          <a:bodyPr wrap="none" lIns="18288" rIns="18288" tIns="18288" bIns="18288" anchor="t">
+            <a:spAutoFit/>
+          </a:bodyPr>
+          <a:lstStyle/>
+          <a:p>
+            <a:pPr algn="ctr">
               <a:spcAft>
                 <a:spcPts val="0"/>
               </a:spcAft>
@@ -3607,21 +4119,53 @@
                 </a:solidFill>
                 <a:latin typeface="Arial"/>
               </a:rPr>
-              <a:t>• x, y — in-plane directions</a:t>
-            </a:r>
-          </a:p>
-        </p:txBody>
-      </p:sp>
-      <p:sp>
-        <p:nvSpPr>
-          <p:cNvPr id="16" name="C4-E04 text 14" descr="sci-ppt:o014"/>
+              <a:t>curvature of the surface</a:t>
+            </a:r>
+          </a:p>
+        </p:txBody>
+      </p:sp>
+      <p:sp>
+        <p:nvSpPr>
+          <p:cNvPr id="22" name="C4-E04 round_rect 20" descr="sci-ppt:o020"/>
+          <p:cNvSpPr/>
+          <p:nvPr/>
+        </p:nvSpPr>
+        <p:spPr>
+          <a:xfrm>
+            <a:off x="8046720" y="1371600"/>
+            <a:ext cx="3611880" cy="3657600"/>
+          </a:xfrm>
+          <a:prstGeom prst="roundRect">
+            <a:avLst/>
+          </a:prstGeom>
+          <a:solidFill>
+            <a:srgbClr val="213E4B"/>
+          </a:solidFill>
+          <a:ln w="20320">
+            <a:solidFill>
+              <a:srgbClr val="F28BA0"/>
+            </a:solidFill>
+          </a:ln>
+          <a:effectLst/>
+        </p:spPr>
+        <p:txBody>
+          <a:bodyPr rtlCol="0" anchor="ctr"/>
+          <a:lstStyle/>
+          <a:p>
+            <a:pPr algn="ctr"/>
+          </a:p>
+        </p:txBody>
+      </p:sp>
+      <p:sp>
+        <p:nvSpPr>
+          <p:cNvPr id="23" name="C4-E04 text 21" descr="sci-ppt:o021"/>
           <p:cNvSpPr txBox="1"/>
           <p:nvPr/>
         </p:nvSpPr>
         <p:spPr>
           <a:xfrm>
-            <a:off x="320040" y="4329684"/>
-            <a:ext cx="5715000" cy="246888"/>
+            <a:off x="8156448" y="1426464"/>
+            <a:ext cx="3392424" cy="254889"/>
           </a:xfrm>
           <a:prstGeom prst="rect">
             <a:avLst/>
@@ -3630,12 +4174,553 @@
           <a:effectLst/>
         </p:spPr>
         <p:txBody>
-          <a:bodyPr wrap="square" lIns="27432" rIns="27432" tIns="18288" bIns="18288" anchor="ctr">
+          <a:bodyPr wrap="none" lIns="18288" rIns="18288" tIns="18288" bIns="18288" anchor="t">
             <a:spAutoFit/>
           </a:bodyPr>
           <a:lstStyle/>
           <a:p>
             <a:pPr algn="l">
+              <a:spcAft>
+                <a:spcPts val="0"/>
+              </a:spcAft>
+            </a:pPr>
+            <a:r>
+              <a:rPr sz="1350" b="1" i="0">
+                <a:solidFill>
+                  <a:srgbClr val="F28BA0"/>
+                </a:solidFill>
+                <a:latin typeface="Arial"/>
+              </a:rPr>
+              <a:t>Tension U_T</a:t>
+            </a:r>
+          </a:p>
+        </p:txBody>
+      </p:sp>
+      <p:sp>
+        <p:nvSpPr>
+          <p:cNvPr id="24" name="C4-E04 polygon 22" descr="sci-ppt:o022"/>
+          <p:cNvSpPr/>
+          <p:nvPr/>
+        </p:nvSpPr>
+        <p:spPr>
+          <a:xfrm>
+            <a:off x="8321040" y="2286063"/>
+            <a:ext cx="3017520" cy="731457"/>
+          </a:xfrm>
+          <a:custGeom>
+            <a:avLst/>
+            <a:gdLst/>
+            <a:ahLst/>
+            <a:cxnLst/>
+            <a:rect l="l" t="t" r="r" b="b"/>
+            <a:pathLst>
+              <a:path w="3017520" h="731457">
+                <a:moveTo>
+                  <a:pt x="0" y="731457"/>
+                </a:moveTo>
+                <a:lnTo>
+                  <a:pt x="25357" y="712147"/>
+                </a:lnTo>
+                <a:lnTo>
+                  <a:pt x="50714" y="692850"/>
+                </a:lnTo>
+                <a:lnTo>
+                  <a:pt x="76071" y="673581"/>
+                </a:lnTo>
+                <a:lnTo>
+                  <a:pt x="101429" y="654352"/>
+                </a:lnTo>
+                <a:lnTo>
+                  <a:pt x="126786" y="635176"/>
+                </a:lnTo>
+                <a:lnTo>
+                  <a:pt x="152143" y="616068"/>
+                </a:lnTo>
+                <a:lnTo>
+                  <a:pt x="177501" y="597040"/>
+                </a:lnTo>
+                <a:lnTo>
+                  <a:pt x="202858" y="578106"/>
+                </a:lnTo>
+                <a:lnTo>
+                  <a:pt x="228215" y="559278"/>
+                </a:lnTo>
+                <a:lnTo>
+                  <a:pt x="253573" y="540571"/>
+                </a:lnTo>
+                <a:lnTo>
+                  <a:pt x="278930" y="521997"/>
+                </a:lnTo>
+                <a:lnTo>
+                  <a:pt x="304287" y="503568"/>
+                </a:lnTo>
+                <a:lnTo>
+                  <a:pt x="329645" y="485299"/>
+                </a:lnTo>
+                <a:lnTo>
+                  <a:pt x="355002" y="467201"/>
+                </a:lnTo>
+                <a:lnTo>
+                  <a:pt x="380359" y="449287"/>
+                </a:lnTo>
+                <a:lnTo>
+                  <a:pt x="405716" y="431570"/>
+                </a:lnTo>
+                <a:lnTo>
+                  <a:pt x="431074" y="414062"/>
+                </a:lnTo>
+                <a:lnTo>
+                  <a:pt x="456431" y="396775"/>
+                </a:lnTo>
+                <a:lnTo>
+                  <a:pt x="481788" y="379721"/>
+                </a:lnTo>
+                <a:lnTo>
+                  <a:pt x="507146" y="362913"/>
+                </a:lnTo>
+                <a:lnTo>
+                  <a:pt x="532503" y="346361"/>
+                </a:lnTo>
+                <a:lnTo>
+                  <a:pt x="557860" y="330077"/>
+                </a:lnTo>
+                <a:lnTo>
+                  <a:pt x="583218" y="314074"/>
+                </a:lnTo>
+                <a:lnTo>
+                  <a:pt x="608575" y="298361"/>
+                </a:lnTo>
+                <a:lnTo>
+                  <a:pt x="633932" y="282950"/>
+                </a:lnTo>
+                <a:lnTo>
+                  <a:pt x="659290" y="267852"/>
+                </a:lnTo>
+                <a:lnTo>
+                  <a:pt x="684647" y="253077"/>
+                </a:lnTo>
+                <a:lnTo>
+                  <a:pt x="710004" y="238635"/>
+                </a:lnTo>
+                <a:lnTo>
+                  <a:pt x="735362" y="224536"/>
+                </a:lnTo>
+                <a:lnTo>
+                  <a:pt x="760719" y="210791"/>
+                </a:lnTo>
+                <a:lnTo>
+                  <a:pt x="786076" y="197409"/>
+                </a:lnTo>
+                <a:lnTo>
+                  <a:pt x="811433" y="184399"/>
+                </a:lnTo>
+                <a:lnTo>
+                  <a:pt x="836791" y="171770"/>
+                </a:lnTo>
+                <a:lnTo>
+                  <a:pt x="862148" y="159531"/>
+                </a:lnTo>
+                <a:lnTo>
+                  <a:pt x="887505" y="147691"/>
+                </a:lnTo>
+                <a:lnTo>
+                  <a:pt x="912863" y="136258"/>
+                </a:lnTo>
+                <a:lnTo>
+                  <a:pt x="938220" y="125239"/>
+                </a:lnTo>
+                <a:lnTo>
+                  <a:pt x="963577" y="114643"/>
+                </a:lnTo>
+                <a:lnTo>
+                  <a:pt x="988935" y="104477"/>
+                </a:lnTo>
+                <a:lnTo>
+                  <a:pt x="1014292" y="94747"/>
+                </a:lnTo>
+                <a:lnTo>
+                  <a:pt x="1039649" y="85462"/>
+                </a:lnTo>
+                <a:lnTo>
+                  <a:pt x="1065007" y="76627"/>
+                </a:lnTo>
+                <a:lnTo>
+                  <a:pt x="1090364" y="68248"/>
+                </a:lnTo>
+                <a:lnTo>
+                  <a:pt x="1115721" y="60331"/>
+                </a:lnTo>
+                <a:lnTo>
+                  <a:pt x="1141078" y="52882"/>
+                </a:lnTo>
+                <a:lnTo>
+                  <a:pt x="1166436" y="45906"/>
+                </a:lnTo>
+                <a:lnTo>
+                  <a:pt x="1191793" y="39407"/>
+                </a:lnTo>
+                <a:lnTo>
+                  <a:pt x="1217150" y="33391"/>
+                </a:lnTo>
+                <a:lnTo>
+                  <a:pt x="1242508" y="27862"/>
+                </a:lnTo>
+                <a:lnTo>
+                  <a:pt x="1267865" y="22823"/>
+                </a:lnTo>
+                <a:lnTo>
+                  <a:pt x="1293222" y="18277"/>
+                </a:lnTo>
+                <a:lnTo>
+                  <a:pt x="1318580" y="14229"/>
+                </a:lnTo>
+                <a:lnTo>
+                  <a:pt x="1343937" y="10680"/>
+                </a:lnTo>
+                <a:lnTo>
+                  <a:pt x="1369294" y="7634"/>
+                </a:lnTo>
+                <a:lnTo>
+                  <a:pt x="1394652" y="5093"/>
+                </a:lnTo>
+                <a:lnTo>
+                  <a:pt x="1420009" y="3057"/>
+                </a:lnTo>
+                <a:lnTo>
+                  <a:pt x="1445366" y="1529"/>
+                </a:lnTo>
+                <a:lnTo>
+                  <a:pt x="1470724" y="510"/>
+                </a:lnTo>
+                <a:lnTo>
+                  <a:pt x="1496081" y="0"/>
+                </a:lnTo>
+                <a:lnTo>
+                  <a:pt x="1521438" y="0"/>
+                </a:lnTo>
+                <a:lnTo>
+                  <a:pt x="1546795" y="510"/>
+                </a:lnTo>
+                <a:lnTo>
+                  <a:pt x="1572153" y="1529"/>
+                </a:lnTo>
+                <a:lnTo>
+                  <a:pt x="1597510" y="3057"/>
+                </a:lnTo>
+                <a:lnTo>
+                  <a:pt x="1622867" y="5093"/>
+                </a:lnTo>
+                <a:lnTo>
+                  <a:pt x="1648225" y="7634"/>
+                </a:lnTo>
+                <a:lnTo>
+                  <a:pt x="1673582" y="10680"/>
+                </a:lnTo>
+                <a:lnTo>
+                  <a:pt x="1698939" y="14229"/>
+                </a:lnTo>
+                <a:lnTo>
+                  <a:pt x="1724297" y="18277"/>
+                </a:lnTo>
+                <a:lnTo>
+                  <a:pt x="1749654" y="22823"/>
+                </a:lnTo>
+                <a:lnTo>
+                  <a:pt x="1775011" y="27862"/>
+                </a:lnTo>
+                <a:lnTo>
+                  <a:pt x="1800369" y="33391"/>
+                </a:lnTo>
+                <a:lnTo>
+                  <a:pt x="1825726" y="39407"/>
+                </a:lnTo>
+                <a:lnTo>
+                  <a:pt x="1851083" y="45906"/>
+                </a:lnTo>
+                <a:lnTo>
+                  <a:pt x="1876441" y="52882"/>
+                </a:lnTo>
+                <a:lnTo>
+                  <a:pt x="1901798" y="60331"/>
+                </a:lnTo>
+                <a:lnTo>
+                  <a:pt x="1927155" y="68248"/>
+                </a:lnTo>
+                <a:lnTo>
+                  <a:pt x="1952512" y="76627"/>
+                </a:lnTo>
+                <a:lnTo>
+                  <a:pt x="1977870" y="85462"/>
+                </a:lnTo>
+                <a:lnTo>
+                  <a:pt x="2003227" y="94747"/>
+                </a:lnTo>
+                <a:lnTo>
+                  <a:pt x="2028584" y="104477"/>
+                </a:lnTo>
+                <a:lnTo>
+                  <a:pt x="2053942" y="114643"/>
+                </a:lnTo>
+                <a:lnTo>
+                  <a:pt x="2079299" y="125239"/>
+                </a:lnTo>
+                <a:lnTo>
+                  <a:pt x="2104656" y="136258"/>
+                </a:lnTo>
+                <a:lnTo>
+                  <a:pt x="2130014" y="147691"/>
+                </a:lnTo>
+                <a:lnTo>
+                  <a:pt x="2155371" y="159531"/>
+                </a:lnTo>
+                <a:lnTo>
+                  <a:pt x="2180728" y="171770"/>
+                </a:lnTo>
+                <a:lnTo>
+                  <a:pt x="2206086" y="184399"/>
+                </a:lnTo>
+                <a:lnTo>
+                  <a:pt x="2231443" y="197409"/>
+                </a:lnTo>
+                <a:lnTo>
+                  <a:pt x="2256800" y="210791"/>
+                </a:lnTo>
+                <a:lnTo>
+                  <a:pt x="2282157" y="224536"/>
+                </a:lnTo>
+                <a:lnTo>
+                  <a:pt x="2307515" y="238635"/>
+                </a:lnTo>
+                <a:lnTo>
+                  <a:pt x="2332872" y="253077"/>
+                </a:lnTo>
+                <a:lnTo>
+                  <a:pt x="2358229" y="267852"/>
+                </a:lnTo>
+                <a:lnTo>
+                  <a:pt x="2383587" y="282950"/>
+                </a:lnTo>
+                <a:lnTo>
+                  <a:pt x="2408944" y="298361"/>
+                </a:lnTo>
+                <a:lnTo>
+                  <a:pt x="2434301" y="314074"/>
+                </a:lnTo>
+                <a:lnTo>
+                  <a:pt x="2459659" y="330077"/>
+                </a:lnTo>
+                <a:lnTo>
+                  <a:pt x="2485016" y="346361"/>
+                </a:lnTo>
+                <a:lnTo>
+                  <a:pt x="2510373" y="362913"/>
+                </a:lnTo>
+                <a:lnTo>
+                  <a:pt x="2535731" y="379721"/>
+                </a:lnTo>
+                <a:lnTo>
+                  <a:pt x="2561088" y="396775"/>
+                </a:lnTo>
+                <a:lnTo>
+                  <a:pt x="2586445" y="414062"/>
+                </a:lnTo>
+                <a:lnTo>
+                  <a:pt x="2611803" y="431570"/>
+                </a:lnTo>
+                <a:lnTo>
+                  <a:pt x="2637160" y="449287"/>
+                </a:lnTo>
+                <a:lnTo>
+                  <a:pt x="2662517" y="467201"/>
+                </a:lnTo>
+                <a:lnTo>
+                  <a:pt x="2687874" y="485299"/>
+                </a:lnTo>
+                <a:lnTo>
+                  <a:pt x="2713232" y="503568"/>
+                </a:lnTo>
+                <a:lnTo>
+                  <a:pt x="2738589" y="521997"/>
+                </a:lnTo>
+                <a:lnTo>
+                  <a:pt x="2763946" y="540571"/>
+                </a:lnTo>
+                <a:lnTo>
+                  <a:pt x="2789304" y="559278"/>
+                </a:lnTo>
+                <a:lnTo>
+                  <a:pt x="2814661" y="578106"/>
+                </a:lnTo>
+                <a:lnTo>
+                  <a:pt x="2840018" y="597040"/>
+                </a:lnTo>
+                <a:lnTo>
+                  <a:pt x="2865376" y="616068"/>
+                </a:lnTo>
+                <a:lnTo>
+                  <a:pt x="2890733" y="635176"/>
+                </a:lnTo>
+                <a:lnTo>
+                  <a:pt x="2916090" y="654352"/>
+                </a:lnTo>
+                <a:lnTo>
+                  <a:pt x="2941448" y="673581"/>
+                </a:lnTo>
+                <a:lnTo>
+                  <a:pt x="2966805" y="692850"/>
+                </a:lnTo>
+                <a:lnTo>
+                  <a:pt x="2992162" y="712147"/>
+                </a:lnTo>
+                <a:lnTo>
+                  <a:pt x="3017520" y="731457"/>
+                </a:lnTo>
+              </a:path>
+            </a:pathLst>
+          </a:custGeom>
+          <a:noFill/>
+          <a:ln w="38100">
+            <a:solidFill>
+              <a:srgbClr val="F28BA0"/>
+            </a:solidFill>
+          </a:ln>
+          <a:effectLst/>
+        </p:spPr>
+        <p:txBody>
+          <a:bodyPr rtlCol="0" anchor="ctr"/>
+          <a:lstStyle/>
+          <a:p>
+            <a:pPr algn="ctr"/>
+          </a:p>
+        </p:txBody>
+      </p:sp>
+      <p:cxnSp>
+        <p:nvCxnSpPr>
+          <p:cNvPr id="25" name="C4-E04 line 23" descr="sci-ppt:o023"/>
+          <p:cNvCxnSpPr/>
+          <p:nvPr/>
+        </p:nvCxnSpPr>
+        <p:spPr>
+          <a:xfrm flipV="1">
+            <a:off x="8321040" y="2468798"/>
+            <a:ext cx="822960" cy="548722"/>
+          </a:xfrm>
+          <a:prstGeom prst="line">
+            <a:avLst/>
+          </a:prstGeom>
+          <a:ln w="19050">
+            <a:solidFill>
+              <a:srgbClr val="B4C7D2"/>
+            </a:solidFill>
+            <a:prstDash val="dash"/>
+          </a:ln>
+          <a:effectLst/>
+        </p:spPr>
+      </p:cxnSp>
+      <p:sp>
+        <p:nvSpPr>
+          <p:cNvPr id="26" name="C4-E04 text 24" descr="sci-ppt:o024"/>
+          <p:cNvSpPr txBox="1"/>
+          <p:nvPr/>
+        </p:nvSpPr>
+        <p:spPr>
+          <a:xfrm>
+            <a:off x="8412480" y="1783080"/>
+            <a:ext cx="2926080" cy="223900"/>
+          </a:xfrm>
+          <a:prstGeom prst="rect">
+            <a:avLst/>
+          </a:prstGeom>
+          <a:noFill/>
+          <a:effectLst/>
+        </p:spPr>
+        <p:txBody>
+          <a:bodyPr wrap="none" lIns="18288" rIns="18288" tIns="18288" bIns="18288" anchor="t">
+            <a:spAutoFit/>
+          </a:bodyPr>
+          <a:lstStyle/>
+          <a:p>
+            <a:pPr algn="l">
+              <a:spcAft>
+                <a:spcPts val="0"/>
+              </a:spcAft>
+            </a:pPr>
+            <a:r>
+              <a:rPr sz="1150" b="0" i="0">
+                <a:solidFill>
+                  <a:srgbClr val="F28BA0"/>
+                </a:solidFill>
+                <a:latin typeface="Arial"/>
+              </a:rPr>
+              <a:t>steep slopes cost most</a:t>
+            </a:r>
+          </a:p>
+        </p:txBody>
+      </p:sp>
+      <p:sp>
+        <p:nvSpPr>
+          <p:cNvPr id="27" name="C4-E04 text 25" descr="sci-ppt:o025"/>
+          <p:cNvSpPr txBox="1"/>
+          <p:nvPr/>
+        </p:nvSpPr>
+        <p:spPr>
+          <a:xfrm>
+            <a:off x="8138160" y="3886200"/>
+            <a:ext cx="3429000" cy="216153"/>
+          </a:xfrm>
+          <a:prstGeom prst="rect">
+            <a:avLst/>
+          </a:prstGeom>
+          <a:noFill/>
+          <a:effectLst/>
+        </p:spPr>
+        <p:txBody>
+          <a:bodyPr wrap="none" lIns="18288" rIns="18288" tIns="18288" bIns="18288" anchor="t">
+            <a:spAutoFit/>
+          </a:bodyPr>
+          <a:lstStyle/>
+          <a:p>
+            <a:pPr algn="ctr">
+              <a:spcAft>
+                <a:spcPts val="0"/>
+              </a:spcAft>
+            </a:pPr>
+            <a:r>
+              <a:rPr sz="1100" b="1" i="0">
+                <a:solidFill>
+                  <a:srgbClr val="E7F0F3"/>
+                </a:solidFill>
+                <a:latin typeface="Arial"/>
+              </a:rPr>
+              <a:t>T₀/2 ∫ |∇w|² dA</a:t>
+            </a:r>
+          </a:p>
+        </p:txBody>
+      </p:sp>
+      <p:sp>
+        <p:nvSpPr>
+          <p:cNvPr id="28" name="C4-E04 text 26" descr="sci-ppt:o026"/>
+          <p:cNvSpPr txBox="1"/>
+          <p:nvPr/>
+        </p:nvSpPr>
+        <p:spPr>
+          <a:xfrm>
+            <a:off x="8138160" y="4663440"/>
+            <a:ext cx="3429000" cy="223900"/>
+          </a:xfrm>
+          <a:prstGeom prst="rect">
+            <a:avLst/>
+          </a:prstGeom>
+          <a:noFill/>
+          <a:effectLst/>
+        </p:spPr>
+        <p:txBody>
+          <a:bodyPr wrap="none" lIns="18288" rIns="18288" tIns="18288" bIns="18288" anchor="t">
+            <a:spAutoFit/>
+          </a:bodyPr>
+          <a:lstStyle/>
+          <a:p>
+            <a:pPr algn="ctr">
               <a:spcAft>
                 <a:spcPts val="0"/>
               </a:spcAft>
@@ -3647,21 +4732,21 @@
                 </a:solidFill>
                 <a:latin typeface="Arial"/>
               </a:rPr>
-              <a:t>• w, ẇ, t — film motion</a:t>
-            </a:r>
-          </a:p>
-        </p:txBody>
-      </p:sp>
-      <p:sp>
-        <p:nvSpPr>
-          <p:cNvPr id="17" name="C4-E04 text 15" descr="sci-ppt:o015"/>
+              <a:t>slope of the surface</a:t>
+            </a:r>
+          </a:p>
+        </p:txBody>
+      </p:sp>
+      <p:sp>
+        <p:nvSpPr>
+          <p:cNvPr id="29" name="C4-E04 text 27" descr="sci-ppt:o027"/>
           <p:cNvSpPr txBox="1"/>
           <p:nvPr/>
         </p:nvSpPr>
         <p:spPr>
           <a:xfrm>
-            <a:off x="6217920" y="4329684"/>
-            <a:ext cx="5715000" cy="246888"/>
+            <a:off x="457200" y="5303520"/>
+            <a:ext cx="11247120" cy="239395"/>
           </a:xfrm>
           <a:prstGeom prst="rect">
             <a:avLst/>
@@ -3670,7 +4755,7 @@
           <a:effectLst/>
         </p:spPr>
         <p:txBody>
-          <a:bodyPr wrap="square" lIns="27432" rIns="27432" tIns="18288" bIns="18288" anchor="ctr">
+          <a:bodyPr wrap="none" lIns="18288" rIns="18288" tIns="18288" bIns="18288" anchor="t">
             <a:spAutoFit/>
           </a:bodyPr>
           <a:lstStyle/>
@@ -3681,27 +4766,67 @@
               </a:spcAft>
             </a:pPr>
             <a:r>
-              <a:rPr sz="1150" b="0" i="0">
+              <a:rPr sz="1250" b="0" i="0">
+                <a:solidFill>
+                  <a:srgbClr val="E7F0F3"/>
+                </a:solidFill>
+                <a:latin typeface="Arial"/>
+              </a:rPr>
+              <a:t>Bending is stored by curvature, tension by slope, kinetic energy by velocity: three separate integrals over the same film Ω_f.</a:t>
+            </a:r>
+          </a:p>
+        </p:txBody>
+      </p:sp>
+      <p:sp>
+        <p:nvSpPr>
+          <p:cNvPr id="30" name="C4-E04 text 28" descr="sci-ppt:o028"/>
+          <p:cNvSpPr txBox="1"/>
+          <p:nvPr/>
+        </p:nvSpPr>
+        <p:spPr>
+          <a:xfrm>
+            <a:off x="457200" y="5806440"/>
+            <a:ext cx="11247120" cy="231648"/>
+          </a:xfrm>
+          <a:prstGeom prst="rect">
+            <a:avLst/>
+          </a:prstGeom>
+          <a:noFill/>
+          <a:effectLst/>
+        </p:spPr>
+        <p:txBody>
+          <a:bodyPr wrap="none" lIns="18288" rIns="18288" tIns="18288" bIns="18288" anchor="t">
+            <a:spAutoFit/>
+          </a:bodyPr>
+          <a:lstStyle/>
+          <a:p>
+            <a:pPr algn="l">
+              <a:spcAft>
+                <a:spcPts val="0"/>
+              </a:spcAft>
+            </a:pPr>
+            <a:r>
+              <a:rPr sz="1200" b="0" i="0">
                 <a:solidFill>
                   <a:srgbClr val="B4C7D2"/>
                 </a:solidFill>
                 <a:latin typeface="Arial"/>
               </a:rPr>
-              <a:t>• w_xx, w_yy, w_xy — curvature</a:t>
-            </a:r>
-          </a:p>
-        </p:txBody>
-      </p:sp>
-      <p:sp>
-        <p:nvSpPr>
-          <p:cNvPr id="18" name="C4-E04 text 16" descr="sci-ppt:o016"/>
+              <a:t>Valid for small deflection, uniform thin plate, with in-plane tension T₀ taken as given.</a:t>
+            </a:r>
+          </a:p>
+        </p:txBody>
+      </p:sp>
+      <p:sp>
+        <p:nvSpPr>
+          <p:cNvPr id="31" name="C4-E04 text 29" descr="sci-ppt:o029"/>
           <p:cNvSpPr txBox="1"/>
           <p:nvPr/>
         </p:nvSpPr>
         <p:spPr>
           <a:xfrm>
-            <a:off x="320040" y="4562856"/>
-            <a:ext cx="5715000" cy="246888"/>
+            <a:off x="320040" y="6510528"/>
+            <a:ext cx="11521440" cy="200660"/>
           </a:xfrm>
           <a:prstGeom prst="rect">
             <a:avLst/>
@@ -3710,207 +4835,7 @@
           <a:effectLst/>
         </p:spPr>
         <p:txBody>
-          <a:bodyPr wrap="square" lIns="27432" rIns="27432" tIns="18288" bIns="18288" anchor="ctr">
-            <a:spAutoFit/>
-          </a:bodyPr>
-          <a:lstStyle/>
-          <a:p>
-            <a:pPr algn="l">
-              <a:spcAft>
-                <a:spcPts val="0"/>
-              </a:spcAft>
-            </a:pPr>
-            <a:r>
-              <a:rPr sz="1150" b="0" i="0">
-                <a:solidFill>
-                  <a:srgbClr val="B4C7D2"/>
-                </a:solidFill>
-                <a:latin typeface="Arial"/>
-              </a:rPr>
-              <a:t>• D_f, ν_f — bending</a:t>
-            </a:r>
-          </a:p>
-        </p:txBody>
-      </p:sp>
-      <p:sp>
-        <p:nvSpPr>
-          <p:cNvPr id="19" name="C4-E04 text 17" descr="sci-ppt:o017"/>
-          <p:cNvSpPr txBox="1"/>
-          <p:nvPr/>
-        </p:nvSpPr>
-        <p:spPr>
-          <a:xfrm>
-            <a:off x="6217920" y="4562856"/>
-            <a:ext cx="5715000" cy="246888"/>
-          </a:xfrm>
-          <a:prstGeom prst="rect">
-            <a:avLst/>
-          </a:prstGeom>
-          <a:noFill/>
-          <a:effectLst/>
-        </p:spPr>
-        <p:txBody>
-          <a:bodyPr wrap="square" lIns="27432" rIns="27432" tIns="18288" bIns="18288" anchor="ctr">
-            <a:spAutoFit/>
-          </a:bodyPr>
-          <a:lstStyle/>
-          <a:p>
-            <a:pPr algn="l">
-              <a:spcAft>
-                <a:spcPts val="0"/>
-              </a:spcAft>
-            </a:pPr>
-            <a:r>
-              <a:rPr sz="1150" b="0" i="0">
-                <a:solidFill>
-                  <a:srgbClr val="B4C7D2"/>
-                </a:solidFill>
-                <a:latin typeface="Arial"/>
-              </a:rPr>
-              <a:t>• m_A → K_f</a:t>
-            </a:r>
-          </a:p>
-        </p:txBody>
-      </p:sp>
-      <p:sp>
-        <p:nvSpPr>
-          <p:cNvPr id="20" name="C4-E04 text 18" descr="sci-ppt:o018"/>
-          <p:cNvSpPr txBox="1"/>
-          <p:nvPr/>
-        </p:nvSpPr>
-        <p:spPr>
-          <a:xfrm>
-            <a:off x="320040" y="4796028"/>
-            <a:ext cx="5715000" cy="246888"/>
-          </a:xfrm>
-          <a:prstGeom prst="rect">
-            <a:avLst/>
-          </a:prstGeom>
-          <a:noFill/>
-          <a:effectLst/>
-        </p:spPr>
-        <p:txBody>
-          <a:bodyPr wrap="square" lIns="27432" rIns="27432" tIns="18288" bIns="18288" anchor="ctr">
-            <a:spAutoFit/>
-          </a:bodyPr>
-          <a:lstStyle/>
-          <a:p>
-            <a:pPr algn="l">
-              <a:spcAft>
-                <a:spcPts val="0"/>
-              </a:spcAft>
-            </a:pPr>
-            <a:r>
-              <a:rPr sz="1150" b="0" i="0">
-                <a:solidFill>
-                  <a:srgbClr val="B4C7D2"/>
-                </a:solidFill>
-                <a:latin typeface="Arial"/>
-              </a:rPr>
-              <a:t>• T₀ → U_T</a:t>
-            </a:r>
-          </a:p>
-        </p:txBody>
-      </p:sp>
-      <p:sp>
-        <p:nvSpPr>
-          <p:cNvPr id="21" name="C4-E04 text 19" descr="sci-ppt:o019"/>
-          <p:cNvSpPr txBox="1"/>
-          <p:nvPr/>
-        </p:nvSpPr>
-        <p:spPr>
-          <a:xfrm>
-            <a:off x="6217920" y="4796028"/>
-            <a:ext cx="5715000" cy="246888"/>
-          </a:xfrm>
-          <a:prstGeom prst="rect">
-            <a:avLst/>
-          </a:prstGeom>
-          <a:noFill/>
-          <a:effectLst/>
-        </p:spPr>
-        <p:txBody>
-          <a:bodyPr wrap="square" lIns="27432" rIns="27432" tIns="18288" bIns="18288" anchor="ctr">
-            <a:spAutoFit/>
-          </a:bodyPr>
-          <a:lstStyle/>
-          <a:p>
-            <a:pPr algn="l">
-              <a:spcAft>
-                <a:spcPts val="0"/>
-              </a:spcAft>
-            </a:pPr>
-            <a:r>
-              <a:rPr sz="1150" b="0" i="0">
-                <a:solidFill>
-                  <a:srgbClr val="B4C7D2"/>
-                </a:solidFill>
-                <a:latin typeface="Arial"/>
-              </a:rPr>
-              <a:t>• U_b — shape energy</a:t>
-            </a:r>
-          </a:p>
-        </p:txBody>
-      </p:sp>
-      <p:sp>
-        <p:nvSpPr>
-          <p:cNvPr id="22" name="C4-E04 text 20" descr="sci-ppt:o020"/>
-          <p:cNvSpPr txBox="1"/>
-          <p:nvPr/>
-        </p:nvSpPr>
-        <p:spPr>
-          <a:xfrm>
-            <a:off x="320040" y="5596128"/>
-            <a:ext cx="11430000" cy="292608"/>
-          </a:xfrm>
-          <a:prstGeom prst="rect">
-            <a:avLst/>
-          </a:prstGeom>
-          <a:noFill/>
-          <a:effectLst/>
-        </p:spPr>
-        <p:txBody>
-          <a:bodyPr wrap="square" lIns="27432" rIns="27432" tIns="18288" bIns="18288" anchor="ctr">
-            <a:spAutoFit/>
-          </a:bodyPr>
-          <a:lstStyle/>
-          <a:p>
-            <a:pPr algn="l">
-              <a:spcAft>
-                <a:spcPts val="0"/>
-              </a:spcAft>
-            </a:pPr>
-            <a:r>
-              <a:rPr sz="1150" b="0" i="0">
-                <a:solidFill>
-                  <a:srgbClr val="8EDBD4"/>
-                </a:solidFill>
-                <a:latin typeface="Arial"/>
-              </a:rPr>
-              <a:t>Clamped edge: displacement and normal slope fixed.</a:t>
-            </a:r>
-          </a:p>
-        </p:txBody>
-      </p:sp>
-      <p:sp>
-        <p:nvSpPr>
-          <p:cNvPr id="23" name="C4-E04 text 21" descr="sci-ppt:o021"/>
-          <p:cNvSpPr txBox="1"/>
-          <p:nvPr/>
-        </p:nvSpPr>
-        <p:spPr>
-          <a:xfrm>
-            <a:off x="320040" y="6473952"/>
-            <a:ext cx="11430000" cy="256032"/>
-          </a:xfrm>
-          <a:prstGeom prst="rect">
-            <a:avLst/>
-          </a:prstGeom>
-          <a:noFill/>
-          <a:effectLst/>
-        </p:spPr>
-        <p:txBody>
-          <a:bodyPr wrap="square" lIns="27432" rIns="27432" tIns="18288" bIns="18288" anchor="ctr">
+          <a:bodyPr wrap="none" lIns="18288" rIns="18288" tIns="18288" bIns="18288" anchor="t">
             <a:spAutoFit/>
           </a:bodyPr>
           <a:lstStyle/>
@@ -3927,7 +4852,7 @@
                 </a:solidFill>
                 <a:latin typeface="Arial"/>
               </a:rPr>
-              <a:t>Model schematic; geometry is not to scale.</a:t>
+              <a:t>Linear-plate energies of Eq. C4-E04; the pictures are schematic.</a:t>
             </a:r>
           </a:p>
         </p:txBody>
